--- a/Senior_Design_Deliverables/Spring/expo_poster.pptx
+++ b/Senior_Design_Deliverables/Spring/expo_poster.pptx
@@ -311,14 +311,14 @@
           </a:ln>
           <a:extLst>
             <a:ext uri="{909E8E84-426E-40dd-AFC4-6F175D3DCCD1}">
-              <a14:hiddenFill xmlns:a14="http://schemas.microsoft.com/office/drawing/2010/main" xmlns="">
+              <a14:hiddenFill xmlns="" xmlns:a14="http://schemas.microsoft.com/office/drawing/2010/main">
                 <a:solidFill>
                   <a:srgbClr val="FFFFFF"/>
                 </a:solidFill>
               </a14:hiddenFill>
             </a:ext>
             <a:ext uri="{FAA26D3D-D897-4be2-8F04-BA451C77F1D7}">
-              <ma14:placeholderFlag xmlns:ma14="http://schemas.microsoft.com/office/mac/drawingml/2011/main" xmlns="" val="1"/>
+              <ma14:placeholderFlag xmlns="" xmlns:ma14="http://schemas.microsoft.com/office/mac/drawingml/2011/main" val="1"/>
             </a:ext>
           </a:extLst>
         </p:spPr>
@@ -686,14 +686,14 @@
           <a:ln/>
           <a:extLst>
             <a:ext uri="{909E8E84-426E-40dd-AFC4-6F175D3DCCD1}">
-              <a14:hiddenFill xmlns:a14="http://schemas.microsoft.com/office/drawing/2010/main" xmlns="">
+              <a14:hiddenFill xmlns="" xmlns:a14="http://schemas.microsoft.com/office/drawing/2010/main">
                 <a:solidFill>
                   <a:srgbClr val="FFFFFF"/>
                 </a:solidFill>
               </a14:hiddenFill>
             </a:ext>
             <a:ext uri="{91240B29-F687-4f45-9708-019B960494DF}">
-              <a14:hiddenLine xmlns:a14="http://schemas.microsoft.com/office/drawing/2010/main" xmlns="" w="9525">
+              <a14:hiddenLine xmlns="" xmlns:a14="http://schemas.microsoft.com/office/drawing/2010/main" w="9525">
                 <a:solidFill>
                   <a:srgbClr val="000000"/>
                 </a:solidFill>
@@ -703,7 +703,7 @@
               </a14:hiddenLine>
             </a:ext>
             <a:ext uri="{FAA26D3D-D897-4be2-8F04-BA451C77F1D7}">
-              <ma14:placeholderFlag xmlns:ma14="http://schemas.microsoft.com/office/mac/drawingml/2011/main" xmlns="" val="1"/>
+              <ma14:placeholderFlag xmlns="" xmlns:ma14="http://schemas.microsoft.com/office/mac/drawingml/2011/main" val="1"/>
             </a:ext>
           </a:extLst>
         </p:spPr>
@@ -775,14 +775,14 @@
           <a:ln/>
           <a:extLst>
             <a:ext uri="{909E8E84-426E-40dd-AFC4-6F175D3DCCD1}">
-              <a14:hiddenFill xmlns:a14="http://schemas.microsoft.com/office/drawing/2010/main" xmlns="">
+              <a14:hiddenFill xmlns="" xmlns:a14="http://schemas.microsoft.com/office/drawing/2010/main">
                 <a:solidFill>
                   <a:srgbClr val="FFFFFF"/>
                 </a:solidFill>
               </a14:hiddenFill>
             </a:ext>
             <a:ext uri="{91240B29-F687-4f45-9708-019B960494DF}">
-              <a14:hiddenLine xmlns:a14="http://schemas.microsoft.com/office/drawing/2010/main" xmlns="" w="9525">
+              <a14:hiddenLine xmlns="" xmlns:a14="http://schemas.microsoft.com/office/drawing/2010/main" w="9525">
                 <a:solidFill>
                   <a:srgbClr val="000000"/>
                 </a:solidFill>
@@ -2906,36 +2906,6 @@
           <a:chExt cx="0" cy="0"/>
         </a:xfrm>
       </p:grpSpPr>
-      <p:pic>
-        <p:nvPicPr>
-          <p:cNvPr id="2074" name="Picture 2073">
-            <a:extLst>
-              <a:ext uri="{FF2B5EF4-FFF2-40B4-BE49-F238E27FC236}">
-                <a16:creationId xmlns:a16="http://schemas.microsoft.com/office/drawing/2014/main" id="{2FABE848-7330-B6FD-598A-398A000289FF}"/>
-              </a:ext>
-            </a:extLst>
-          </p:cNvPr>
-          <p:cNvPicPr>
-            <a:picLocks noChangeAspect="1"/>
-          </p:cNvPicPr>
-          <p:nvPr/>
-        </p:nvPicPr>
-        <p:blipFill>
-          <a:blip r:embed="rId3"/>
-          <a:stretch>
-            <a:fillRect/>
-          </a:stretch>
-        </p:blipFill>
-        <p:spPr>
-          <a:xfrm>
-            <a:off x="13180777" y="6277908"/>
-            <a:ext cx="16435913" cy="3402056"/>
-          </a:xfrm>
-          <a:prstGeom prst="rect">
-            <a:avLst/>
-          </a:prstGeom>
-        </p:spPr>
-      </p:pic>
       <p:sp>
         <p:nvSpPr>
           <p:cNvPr id="2" name="TextBox 1">
@@ -2950,8 +2920,8 @@
         </p:nvSpPr>
         <p:spPr>
           <a:xfrm>
-            <a:off x="0" y="0"/>
-            <a:ext cx="43891200" cy="3970318"/>
+            <a:off x="7165702" y="77376"/>
+            <a:ext cx="28117800" cy="4204934"/>
           </a:xfrm>
           <a:prstGeom prst="rect">
             <a:avLst/>
@@ -2966,7 +2936,7 @@
           <a:p>
             <a:pPr algn="ctr"/>
             <a:r>
-              <a:rPr lang="en-US" sz="9600" b="1" dirty="0">
+              <a:rPr lang="en-US" sz="8800" b="1" dirty="0">
                 <a:solidFill>
                   <a:schemeClr val="bg1"/>
                 </a:solidFill>
@@ -2977,7 +2947,7 @@
           <a:p>
             <a:pPr algn="ctr"/>
             <a:r>
-              <a:rPr lang="en-US" sz="9600" b="1" dirty="0">
+              <a:rPr lang="en-US" sz="8800" b="1" dirty="0">
                 <a:solidFill>
                   <a:schemeClr val="bg1"/>
                 </a:solidFill>
@@ -2986,14 +2956,18 @@
             </a:r>
           </a:p>
           <a:p>
-            <a:pPr algn="ctr"/>
-            <a:r>
-              <a:rPr lang="en-US" sz="6000" dirty="0">
+            <a:pPr algn="ctr">
+              <a:lnSpc>
+                <a:spcPct val="200000"/>
+              </a:lnSpc>
+            </a:pPr>
+            <a:r>
+              <a:rPr lang="en-US" sz="5400" b="1" dirty="0">
                 <a:solidFill>
                   <a:schemeClr val="bg1"/>
                 </a:solidFill>
               </a:rPr>
-              <a:t>John Parks</a:t>
+              <a:t>Paper accepted into SaTC 2026</a:t>
             </a:r>
           </a:p>
         </p:txBody>
@@ -3012,13 +2986,16 @@
         </p:nvSpPr>
         <p:spPr>
           <a:xfrm>
-            <a:off x="0" y="2954655"/>
-            <a:ext cx="9677400" cy="1015663"/>
+            <a:off x="775651" y="3003948"/>
+            <a:ext cx="9677400" cy="830997"/>
           </a:xfrm>
           <a:prstGeom prst="rect">
             <a:avLst/>
           </a:prstGeom>
           <a:noFill/>
+          <a:ln>
+            <a:noFill/>
+          </a:ln>
         </p:spPr>
         <p:txBody>
           <a:bodyPr wrap="square" rtlCol="0">
@@ -3027,7 +3004,7 @@
           <a:lstStyle/>
           <a:p>
             <a:r>
-              <a:rPr lang="en-US" sz="6000" dirty="0">
+              <a:rPr lang="en-US" sz="4800" dirty="0">
                 <a:solidFill>
                   <a:schemeClr val="bg1"/>
                 </a:solidFill>
@@ -6141,8 +6118,8 @@
         </p:nvSpPr>
         <p:spPr>
           <a:xfrm>
-            <a:off x="536359" y="14099745"/>
-            <a:ext cx="11786421" cy="4524315"/>
+            <a:off x="536359" y="14698682"/>
+            <a:ext cx="11786421" cy="3970318"/>
           </a:xfrm>
           <a:prstGeom prst="rect">
             <a:avLst/>
@@ -6169,7 +6146,7 @@
             </a:r>
             <a:r>
               <a:rPr lang="en-US" sz="3600" dirty="0"/>
-              <a:t> such as Verilog, SystemVerilog, or VHDL. Because RTL is expressed as code, it can be analyzed using static analysis techniques.</a:t>
+              <a:t> such as Verilog, SystemVerilog, or VHDL.</a:t>
             </a:r>
             <a:endParaRPr lang="en-US" sz="3600" b="1" dirty="0"/>
           </a:p>
@@ -6317,89 +6294,8 @@
                 <a:latin typeface="Arial" charset="0"/>
                 <a:ea typeface="ＭＳ Ｐゴシック" pitchFamily="-109" charset="-128"/>
               </a:rPr>
-              <a:t>Limitations</a:t>
-            </a:r>
-          </a:p>
-        </p:txBody>
-      </p:sp>
-      <p:sp>
-        <p:nvSpPr>
-          <p:cNvPr id="44" name="Rectangle: Rounded Corners 43">
-            <a:extLst>
-              <a:ext uri="{FF2B5EF4-FFF2-40B4-BE49-F238E27FC236}">
-                <a16:creationId xmlns:a16="http://schemas.microsoft.com/office/drawing/2014/main" id="{833921A6-58C2-16C7-3531-FAFFA01B6550}"/>
-              </a:ext>
-            </a:extLst>
-          </p:cNvPr>
-          <p:cNvSpPr/>
-          <p:nvPr/>
-        </p:nvSpPr>
-        <p:spPr bwMode="auto">
-          <a:xfrm>
-            <a:off x="45186600" y="5186292"/>
-            <a:ext cx="12898245" cy="1531918"/>
-          </a:xfrm>
-          <a:prstGeom prst="roundRect">
-            <a:avLst/>
-          </a:prstGeom>
-          <a:solidFill>
-            <a:srgbClr val="D22030"/>
-          </a:solidFill>
-          <a:ln w="9525" cap="flat" cmpd="sng" algn="ctr">
-            <a:solidFill>
-              <a:schemeClr val="tx1"/>
-            </a:solidFill>
-            <a:prstDash val="solid"/>
-            <a:round/>
-            <a:headEnd type="none" w="med" len="med"/>
-            <a:tailEnd type="none" w="med" len="med"/>
-          </a:ln>
-          <a:effectLst/>
-        </p:spPr>
-        <p:txBody>
-          <a:bodyPr vert="horz" wrap="square" lIns="91440" tIns="45720" rIns="91440" bIns="45720" numCol="1" rtlCol="0" anchor="ctr" anchorCtr="0" compatLnSpc="1">
-            <a:prstTxWarp prst="textNoShape">
-              <a:avLst/>
-            </a:prstTxWarp>
-          </a:bodyPr>
-          <a:lstStyle/>
-          <a:p>
-            <a:pPr marL="0" marR="0" indent="0" algn="ctr" defTabSz="914400" rtl="0" eaLnBrk="0" fontAlgn="base" latinLnBrk="0" hangingPunct="0">
-              <a:lnSpc>
-                <a:spcPct val="100000"/>
-              </a:lnSpc>
-              <a:spcBef>
-                <a:spcPct val="0"/>
-              </a:spcBef>
-              <a:spcAft>
-                <a:spcPct val="0"/>
-              </a:spcAft>
-              <a:buClrTx/>
-              <a:buSzTx/>
-              <a:buFontTx/>
-              <a:buNone/>
-              <a:tabLst/>
-            </a:pPr>
-            <a:r>
-              <a:rPr lang="en-US" sz="5400" b="1" dirty="0">
-                <a:solidFill>
-                  <a:schemeClr val="bg1"/>
-                </a:solidFill>
-                <a:ea typeface="ＭＳ Ｐゴシック" pitchFamily="-109" charset="-128"/>
-              </a:rPr>
-              <a:t>References</a:t>
-            </a:r>
-            <a:endParaRPr kumimoji="0" lang="en-US" sz="5400" b="1" i="0" u="none" strike="noStrike" cap="none" normalizeH="0" baseline="0" dirty="0">
-              <a:ln>
-                <a:noFill/>
-              </a:ln>
-              <a:solidFill>
-                <a:schemeClr val="bg1"/>
-              </a:solidFill>
-              <a:effectLst/>
-              <a:latin typeface="Arial" charset="0"/>
-              <a:ea typeface="ＭＳ Ｐゴシック" pitchFamily="-109" charset="-128"/>
-            </a:endParaRPr>
+              <a:t>Challenges</a:t>
+            </a:r>
           </a:p>
         </p:txBody>
       </p:sp>
@@ -6418,7 +6314,7 @@
           <p:nvPr/>
         </p:nvPicPr>
         <p:blipFill>
-          <a:blip r:embed="rId4">
+          <a:blip r:embed="rId3">
             <a:extLst>
               <a:ext uri="{28A0092B-C50C-407E-A947-70E740481C1C}">
                 <a14:useLocalDpi xmlns:a14="http://schemas.microsoft.com/office/drawing/2010/main" val="0"/>
@@ -7750,20 +7646,12 @@
                 <a:t> </a:t>
               </a:r>
               <a:r>
-                <a:rPr lang="en-US" sz="3600" dirty="0" err="1">
-                  <a:solidFill>
-                    <a:schemeClr val="bg1"/>
-                  </a:solidFill>
-                </a:rPr>
-                <a:t>fsm</a:t>
-              </a:r>
-              <a:r>
                 <a:rPr lang="en-US" sz="3600" dirty="0">
                   <a:solidFill>
                     <a:schemeClr val="bg1"/>
                   </a:solidFill>
                 </a:rPr>
-                <a:t> </a:t>
+                <a:t>fsm </a:t>
               </a:r>
               <a:r>
                 <a:rPr lang="en-US" sz="3600" dirty="0">
@@ -8189,7 +8077,7 @@
             </a:r>
             <a:r>
               <a:rPr lang="en-US" sz="3600" dirty="0"/>
-              <a:t> cannot be fully fixed with software patches or microcode updates alone. They often require physical modifications to the chip itself, driving up costs and leaving systems exposed for longer periods. Meltdown and Spectre demonstrated this by exploiting speculative execution in processors to steal sensitive data and affected nearly every device on the market. This is why catching vulnerabilities before fabrication is critical. The perfect time for that is during RTL design.</a:t>
+              <a:t> cannot be fully fixed with software patches or microcode updates alone. They often require physical modifications to the chip itself, driving up costs and leaving systems exposed for longer periods. Meltdown and Spectre demonstrated this by exploiting speculative execution in processors to steal sensitive data and affected nearly every device on the market.  This is why catching vulnerabilities before fabrication is critical. The perfect time for that is during RTL design.</a:t>
             </a:r>
           </a:p>
         </p:txBody>
@@ -8209,7 +8097,7 @@
           <p:nvPr/>
         </p:nvPicPr>
         <p:blipFill>
-          <a:blip r:embed="rId5" cstate="email">
+          <a:blip r:embed="rId4" cstate="email">
             <a:extLst>
               <a:ext uri="{28A0092B-C50C-407E-A947-70E740481C1C}">
                 <a14:useLocalDpi xmlns:a14="http://schemas.microsoft.com/office/drawing/2010/main" val="0"/>
@@ -8223,7 +8111,7 @@
         </p:blipFill>
         <p:spPr bwMode="auto">
           <a:xfrm>
-            <a:off x="3258804" y="11382742"/>
+            <a:off x="3258804" y="11665054"/>
             <a:ext cx="1406648" cy="2736746"/>
           </a:xfrm>
           <a:prstGeom prst="rect">
@@ -8258,10 +8146,10 @@
         </p:nvGrpSpPr>
         <p:grpSpPr>
           <a:xfrm>
-            <a:off x="6317205" y="11345582"/>
-            <a:ext cx="2950100" cy="2974618"/>
+            <a:off x="6317205" y="11734800"/>
+            <a:ext cx="2950100" cy="3437218"/>
             <a:chOff x="6696279" y="10777030"/>
-            <a:chExt cx="2950100" cy="2974618"/>
+            <a:chExt cx="2950100" cy="3634009"/>
           </a:xfrm>
         </p:grpSpPr>
         <p:pic>
@@ -8279,7 +8167,7 @@
             <p:nvPr/>
           </p:nvPicPr>
           <p:blipFill>
-            <a:blip r:embed="rId6">
+            <a:blip r:embed="rId5">
               <a:extLst>
                 <a:ext uri="{28A0092B-C50C-407E-A947-70E740481C1C}">
                   <a14:useLocalDpi xmlns:a14="http://schemas.microsoft.com/office/drawing/2010/main" val="0"/>
@@ -8328,8 +8216,8 @@
           </p:nvSpPr>
           <p:spPr>
             <a:xfrm>
-              <a:off x="6933982" y="13105317"/>
-              <a:ext cx="2142921" cy="646331"/>
+              <a:off x="6933981" y="13105313"/>
+              <a:ext cx="2142920" cy="1305726"/>
             </a:xfrm>
             <a:prstGeom prst="rect">
               <a:avLst/>
@@ -8484,6 +8372,157 @@
           </a:p>
         </p:txBody>
       </p:sp>
+      <p:pic>
+        <p:nvPicPr>
+          <p:cNvPr id="9" name="Picture 8">
+            <a:extLst>
+              <a:ext uri="{FF2B5EF4-FFF2-40B4-BE49-F238E27FC236}">
+                <a16:creationId xmlns:a16="http://schemas.microsoft.com/office/drawing/2014/main" id="{AC4782A5-DC7A-1895-514A-E7CF664ACB0F}"/>
+              </a:ext>
+            </a:extLst>
+          </p:cNvPr>
+          <p:cNvPicPr>
+            <a:picLocks noChangeAspect="1"/>
+          </p:cNvPicPr>
+          <p:nvPr/>
+        </p:nvPicPr>
+        <p:blipFill>
+          <a:blip r:embed="rId6" cstate="email">
+            <a:extLst>
+              <a:ext uri="{28A0092B-C50C-407E-A947-70E740481C1C}">
+                <a14:useLocalDpi xmlns:a14="http://schemas.microsoft.com/office/drawing/2010/main" val="0"/>
+              </a:ext>
+            </a:extLst>
+          </a:blip>
+          <a:stretch>
+            <a:fillRect/>
+          </a:stretch>
+        </p:blipFill>
+        <p:spPr>
+          <a:xfrm>
+            <a:off x="775651" y="192196"/>
+            <a:ext cx="2483153" cy="2483153"/>
+          </a:xfrm>
+          <a:prstGeom prst="ellipse">
+            <a:avLst/>
+          </a:prstGeom>
+        </p:spPr>
+      </p:pic>
+      <p:sp>
+        <p:nvSpPr>
+          <p:cNvPr id="13" name="TextBox 12">
+            <a:extLst>
+              <a:ext uri="{FF2B5EF4-FFF2-40B4-BE49-F238E27FC236}">
+                <a16:creationId xmlns:a16="http://schemas.microsoft.com/office/drawing/2014/main" id="{6A9B676D-C84D-D40B-9666-0B2B1D26C34D}"/>
+              </a:ext>
+            </a:extLst>
+          </p:cNvPr>
+          <p:cNvSpPr txBox="1"/>
+          <p:nvPr/>
+        </p:nvSpPr>
+        <p:spPr>
+          <a:xfrm>
+            <a:off x="3424176" y="647129"/>
+            <a:ext cx="4100622" cy="1508105"/>
+          </a:xfrm>
+          <a:prstGeom prst="rect">
+            <a:avLst/>
+          </a:prstGeom>
+          <a:noFill/>
+        </p:spPr>
+        <p:txBody>
+          <a:bodyPr wrap="square" rtlCol="0">
+            <a:spAutoFit/>
+          </a:bodyPr>
+          <a:lstStyle/>
+          <a:p>
+            <a:r>
+              <a:rPr lang="en-US" sz="6000" dirty="0">
+                <a:solidFill>
+                  <a:schemeClr val="bg1"/>
+                </a:solidFill>
+              </a:rPr>
+              <a:t>John Parks</a:t>
+            </a:r>
+          </a:p>
+          <a:p>
+            <a:pPr algn="ctr"/>
+            <a:r>
+              <a:rPr lang="en-US" sz="3200" dirty="0">
+                <a:solidFill>
+                  <a:schemeClr val="bg1"/>
+                </a:solidFill>
+              </a:rPr>
+              <a:t>Computer Science </a:t>
+            </a:r>
+          </a:p>
+        </p:txBody>
+      </p:sp>
+      <p:pic>
+        <p:nvPicPr>
+          <p:cNvPr id="26" name="Picture 25">
+            <a:extLst>
+              <a:ext uri="{FF2B5EF4-FFF2-40B4-BE49-F238E27FC236}">
+                <a16:creationId xmlns:a16="http://schemas.microsoft.com/office/drawing/2014/main" id="{6FFF2FC8-9BB4-8B09-4AA3-9FAFA9FB9E3B}"/>
+              </a:ext>
+            </a:extLst>
+          </p:cNvPr>
+          <p:cNvPicPr>
+            <a:picLocks noChangeAspect="1"/>
+          </p:cNvPicPr>
+          <p:nvPr/>
+        </p:nvPicPr>
+        <p:blipFill>
+          <a:blip r:embed="rId7"/>
+          <a:stretch>
+            <a:fillRect/>
+          </a:stretch>
+        </p:blipFill>
+        <p:spPr>
+          <a:xfrm>
+            <a:off x="13055046" y="6379782"/>
+            <a:ext cx="16704081" cy="3173019"/>
+          </a:xfrm>
+          <a:prstGeom prst="rect">
+            <a:avLst/>
+          </a:prstGeom>
+        </p:spPr>
+      </p:pic>
+      <p:cxnSp>
+        <p:nvCxnSpPr>
+          <p:cNvPr id="28" name="Straight Connector 27">
+            <a:extLst>
+              <a:ext uri="{FF2B5EF4-FFF2-40B4-BE49-F238E27FC236}">
+                <a16:creationId xmlns:a16="http://schemas.microsoft.com/office/drawing/2014/main" id="{FA06859F-1587-7127-0D1C-5368C1E9E9DB}"/>
+              </a:ext>
+            </a:extLst>
+          </p:cNvPr>
+          <p:cNvCxnSpPr/>
+          <p:nvPr/>
+        </p:nvCxnSpPr>
+        <p:spPr bwMode="auto">
+          <a:xfrm>
+            <a:off x="0" y="4191000"/>
+            <a:ext cx="43891200" cy="0"/>
+          </a:xfrm>
+          <a:prstGeom prst="line">
+            <a:avLst/>
+          </a:prstGeom>
+          <a:solidFill>
+            <a:schemeClr val="accent1"/>
+          </a:solidFill>
+          <a:ln w="9525" cap="flat" cmpd="sng" algn="ctr">
+            <a:solidFill>
+              <a:schemeClr val="tx1"/>
+            </a:solidFill>
+            <a:prstDash val="solid"/>
+            <a:round/>
+            <a:headEnd type="none" w="med" len="med"/>
+            <a:tailEnd type="none" w="med" len="med"/>
+          </a:ln>
+          <a:effectLst/>
+        </p:spPr>
+      </p:cxnSp>
     </p:spTree>
   </p:cSld>
   <p:clrMapOvr>
